--- a/для дедлайнов/presentation.pptx
+++ b/для дедлайнов/presentation.pptx
@@ -12,8 +12,11 @@
     <p:sldId id="260" r:id="rId6"/>
     <p:sldId id="262" r:id="rId7"/>
     <p:sldId id="261" r:id="rId8"/>
-    <p:sldId id="263" r:id="rId9"/>
-    <p:sldId id="264" r:id="rId10"/>
+    <p:sldId id="265" r:id="rId9"/>
+    <p:sldId id="266" r:id="rId10"/>
+    <p:sldId id="267" r:id="rId11"/>
+    <p:sldId id="263" r:id="rId12"/>
+    <p:sldId id="264" r:id="rId13"/>
   </p:sldIdLst>
   <p:sldSz cx="12192000" cy="6858000"/>
   <p:notesSz cx="6858000" cy="9144000"/>
@@ -112,6 +115,11 @@
       </a:defRPr>
     </a:lvl9pPr>
   </p:defaultTextStyle>
+  <p:extLst>
+    <p:ext uri="{EFAFB233-063F-42B5-8137-9DF3F51BA10A}">
+      <p15:sldGuideLst xmlns:p15="http://schemas.microsoft.com/office/powerpoint/2012/main"/>
+    </p:ext>
+  </p:extLst>
 </p:presentation>
 </file>
 
@@ -246,7 +254,7 @@
           <a:p>
             <a:fld id="{C86A14BA-7598-40AF-97A2-32E4039DED2A}" type="datetimeFigureOut">
               <a:rPr lang="ru-RU" smtClean="0"/>
-              <a:t>06.05.2026</a:t>
+              <a:t>13.05.2026</a:t>
             </a:fld>
             <a:endParaRPr lang="ru-RU"/>
           </a:p>
@@ -416,7 +424,7 @@
           <a:p>
             <a:fld id="{C86A14BA-7598-40AF-97A2-32E4039DED2A}" type="datetimeFigureOut">
               <a:rPr lang="ru-RU" smtClean="0"/>
-              <a:t>06.05.2026</a:t>
+              <a:t>13.05.2026</a:t>
             </a:fld>
             <a:endParaRPr lang="ru-RU"/>
           </a:p>
@@ -596,7 +604,7 @@
           <a:p>
             <a:fld id="{C86A14BA-7598-40AF-97A2-32E4039DED2A}" type="datetimeFigureOut">
               <a:rPr lang="ru-RU" smtClean="0"/>
-              <a:t>06.05.2026</a:t>
+              <a:t>13.05.2026</a:t>
             </a:fld>
             <a:endParaRPr lang="ru-RU"/>
           </a:p>
@@ -766,7 +774,7 @@
           <a:p>
             <a:fld id="{C86A14BA-7598-40AF-97A2-32E4039DED2A}" type="datetimeFigureOut">
               <a:rPr lang="ru-RU" smtClean="0"/>
-              <a:t>06.05.2026</a:t>
+              <a:t>13.05.2026</a:t>
             </a:fld>
             <a:endParaRPr lang="ru-RU"/>
           </a:p>
@@ -1012,7 +1020,7 @@
           <a:p>
             <a:fld id="{C86A14BA-7598-40AF-97A2-32E4039DED2A}" type="datetimeFigureOut">
               <a:rPr lang="ru-RU" smtClean="0"/>
-              <a:t>06.05.2026</a:t>
+              <a:t>13.05.2026</a:t>
             </a:fld>
             <a:endParaRPr lang="ru-RU"/>
           </a:p>
@@ -1244,7 +1252,7 @@
           <a:p>
             <a:fld id="{C86A14BA-7598-40AF-97A2-32E4039DED2A}" type="datetimeFigureOut">
               <a:rPr lang="ru-RU" smtClean="0"/>
-              <a:t>06.05.2026</a:t>
+              <a:t>13.05.2026</a:t>
             </a:fld>
             <a:endParaRPr lang="ru-RU"/>
           </a:p>
@@ -1611,7 +1619,7 @@
           <a:p>
             <a:fld id="{C86A14BA-7598-40AF-97A2-32E4039DED2A}" type="datetimeFigureOut">
               <a:rPr lang="ru-RU" smtClean="0"/>
-              <a:t>06.05.2026</a:t>
+              <a:t>13.05.2026</a:t>
             </a:fld>
             <a:endParaRPr lang="ru-RU"/>
           </a:p>
@@ -1729,7 +1737,7 @@
           <a:p>
             <a:fld id="{C86A14BA-7598-40AF-97A2-32E4039DED2A}" type="datetimeFigureOut">
               <a:rPr lang="ru-RU" smtClean="0"/>
-              <a:t>06.05.2026</a:t>
+              <a:t>13.05.2026</a:t>
             </a:fld>
             <a:endParaRPr lang="ru-RU"/>
           </a:p>
@@ -1824,7 +1832,7 @@
           <a:p>
             <a:fld id="{C86A14BA-7598-40AF-97A2-32E4039DED2A}" type="datetimeFigureOut">
               <a:rPr lang="ru-RU" smtClean="0"/>
-              <a:t>06.05.2026</a:t>
+              <a:t>13.05.2026</a:t>
             </a:fld>
             <a:endParaRPr lang="ru-RU"/>
           </a:p>
@@ -2101,7 +2109,7 @@
           <a:p>
             <a:fld id="{C86A14BA-7598-40AF-97A2-32E4039DED2A}" type="datetimeFigureOut">
               <a:rPr lang="ru-RU" smtClean="0"/>
-              <a:t>06.05.2026</a:t>
+              <a:t>13.05.2026</a:t>
             </a:fld>
             <a:endParaRPr lang="ru-RU"/>
           </a:p>
@@ -2354,7 +2362,7 @@
           <a:p>
             <a:fld id="{C86A14BA-7598-40AF-97A2-32E4039DED2A}" type="datetimeFigureOut">
               <a:rPr lang="ru-RU" smtClean="0"/>
-              <a:t>06.05.2026</a:t>
+              <a:t>13.05.2026</a:t>
             </a:fld>
             <a:endParaRPr lang="ru-RU"/>
           </a:p>
@@ -2567,7 +2575,7 @@
           <a:p>
             <a:fld id="{C86A14BA-7598-40AF-97A2-32E4039DED2A}" type="datetimeFigureOut">
               <a:rPr lang="ru-RU" smtClean="0"/>
-              <a:t>06.05.2026</a:t>
+              <a:t>13.05.2026</a:t>
             </a:fld>
             <a:endParaRPr lang="ru-RU"/>
           </a:p>
@@ -3252,6 +3260,459 @@
 </p:sld>
 </file>
 
+<file path=ppt/slides/slide10.xml><?xml version="1.0" encoding="utf-8"?>
+<p:sld xmlns:a="http://schemas.openxmlformats.org/drawingml/2006/main" xmlns:r="http://schemas.openxmlformats.org/officeDocument/2006/relationships" xmlns:p="http://schemas.openxmlformats.org/presentationml/2006/main">
+  <p:cSld>
+    <p:bg>
+      <p:bgPr>
+        <a:solidFill>
+          <a:schemeClr val="accent1">
+            <a:lumMod val="75000"/>
+          </a:schemeClr>
+        </a:solidFill>
+        <a:effectLst/>
+      </p:bgPr>
+    </p:bg>
+    <p:spTree>
+      <p:nvGrpSpPr>
+        <p:cNvPr id="1" name=""/>
+        <p:cNvGrpSpPr/>
+        <p:nvPr/>
+      </p:nvGrpSpPr>
+      <p:grpSpPr>
+        <a:xfrm>
+          <a:off x="0" y="0"/>
+          <a:ext cx="0" cy="0"/>
+          <a:chOff x="0" y="0"/>
+          <a:chExt cx="0" cy="0"/>
+        </a:xfrm>
+      </p:grpSpPr>
+      <p:sp>
+        <p:nvSpPr>
+          <p:cNvPr id="2" name="Заголовок 1"/>
+          <p:cNvSpPr>
+            <a:spLocks noGrp="1"/>
+          </p:cNvSpPr>
+          <p:nvPr>
+            <p:ph type="title"/>
+          </p:nvPr>
+        </p:nvSpPr>
+        <p:spPr/>
+        <p:txBody>
+          <a:bodyPr/>
+          <a:lstStyle/>
+          <a:p>
+            <a:endParaRPr lang="ru-RU"/>
+          </a:p>
+        </p:txBody>
+      </p:sp>
+      <p:sp>
+        <p:nvSpPr>
+          <p:cNvPr id="3" name="Объект 2"/>
+          <p:cNvSpPr>
+            <a:spLocks noGrp="1"/>
+          </p:cNvSpPr>
+          <p:nvPr>
+            <p:ph idx="1"/>
+          </p:nvPr>
+        </p:nvSpPr>
+        <p:spPr/>
+        <p:txBody>
+          <a:bodyPr/>
+          <a:lstStyle/>
+          <a:p>
+            <a:endParaRPr lang="ru-RU"/>
+          </a:p>
+        </p:txBody>
+      </p:sp>
+      <p:pic>
+        <p:nvPicPr>
+          <p:cNvPr id="4" name="Рисунок 3"/>
+          <p:cNvPicPr>
+            <a:picLocks noChangeAspect="1"/>
+          </p:cNvPicPr>
+          <p:nvPr/>
+        </p:nvPicPr>
+        <p:blipFill>
+          <a:blip r:embed="rId2"/>
+          <a:stretch>
+            <a:fillRect/>
+          </a:stretch>
+        </p:blipFill>
+        <p:spPr>
+          <a:xfrm>
+            <a:off x="1276291" y="0"/>
+            <a:ext cx="9639418" cy="6858000"/>
+          </a:xfrm>
+          <a:prstGeom prst="rect">
+            <a:avLst/>
+          </a:prstGeom>
+        </p:spPr>
+      </p:pic>
+    </p:spTree>
+    <p:extLst>
+      <p:ext uri="{BB962C8B-B14F-4D97-AF65-F5344CB8AC3E}">
+        <p14:creationId xmlns:p14="http://schemas.microsoft.com/office/powerpoint/2010/main" val="1930629511"/>
+      </p:ext>
+    </p:extLst>
+  </p:cSld>
+  <p:clrMapOvr>
+    <a:masterClrMapping/>
+  </p:clrMapOvr>
+</p:sld>
+</file>
+
+<file path=ppt/slides/slide11.xml><?xml version="1.0" encoding="utf-8"?>
+<p:sld xmlns:a="http://schemas.openxmlformats.org/drawingml/2006/main" xmlns:r="http://schemas.openxmlformats.org/officeDocument/2006/relationships" xmlns:p="http://schemas.openxmlformats.org/presentationml/2006/main">
+  <p:cSld>
+    <p:spTree>
+      <p:nvGrpSpPr>
+        <p:cNvPr id="1" name=""/>
+        <p:cNvGrpSpPr/>
+        <p:nvPr/>
+      </p:nvGrpSpPr>
+      <p:grpSpPr>
+        <a:xfrm>
+          <a:off x="0" y="0"/>
+          <a:ext cx="0" cy="0"/>
+          <a:chOff x="0" y="0"/>
+          <a:chExt cx="0" cy="0"/>
+        </a:xfrm>
+      </p:grpSpPr>
+      <p:pic>
+        <p:nvPicPr>
+          <p:cNvPr id="5" name="Рисунок 4"/>
+          <p:cNvPicPr>
+            <a:picLocks noChangeAspect="1"/>
+          </p:cNvPicPr>
+          <p:nvPr/>
+        </p:nvPicPr>
+        <p:blipFill>
+          <a:blip r:embed="rId2"/>
+          <a:stretch>
+            <a:fillRect/>
+          </a:stretch>
+        </p:blipFill>
+        <p:spPr>
+          <a:xfrm>
+            <a:off x="-142240" y="-363441"/>
+            <a:ext cx="12415520" cy="8282636"/>
+          </a:xfrm>
+          <a:prstGeom prst="rect">
+            <a:avLst/>
+          </a:prstGeom>
+        </p:spPr>
+      </p:pic>
+      <p:sp>
+        <p:nvSpPr>
+          <p:cNvPr id="6" name="Прямоугольник 5"/>
+          <p:cNvSpPr/>
+          <p:nvPr/>
+        </p:nvSpPr>
+        <p:spPr>
+          <a:xfrm>
+            <a:off x="-142240" y="-363441"/>
+            <a:ext cx="12954000" cy="8623521"/>
+          </a:xfrm>
+          <a:prstGeom prst="rect">
+            <a:avLst/>
+          </a:prstGeom>
+          <a:solidFill>
+            <a:schemeClr val="accent1">
+              <a:alpha val="65000"/>
+            </a:schemeClr>
+          </a:solidFill>
+        </p:spPr>
+        <p:style>
+          <a:lnRef idx="2">
+            <a:schemeClr val="accent1">
+              <a:shade val="50000"/>
+            </a:schemeClr>
+          </a:lnRef>
+          <a:fillRef idx="1">
+            <a:schemeClr val="accent1"/>
+          </a:fillRef>
+          <a:effectRef idx="0">
+            <a:schemeClr val="accent1"/>
+          </a:effectRef>
+          <a:fontRef idx="minor">
+            <a:schemeClr val="lt1"/>
+          </a:fontRef>
+        </p:style>
+        <p:txBody>
+          <a:bodyPr rtlCol="0" anchor="ctr"/>
+          <a:lstStyle/>
+          <a:p>
+            <a:pPr algn="ctr"/>
+            <a:endParaRPr lang="ru-RU"/>
+          </a:p>
+        </p:txBody>
+      </p:sp>
+      <p:sp>
+        <p:nvSpPr>
+          <p:cNvPr id="2" name="Заголовок 1"/>
+          <p:cNvSpPr>
+            <a:spLocks noGrp="1"/>
+          </p:cNvSpPr>
+          <p:nvPr>
+            <p:ph type="title"/>
+          </p:nvPr>
+        </p:nvSpPr>
+        <p:spPr>
+          <a:xfrm>
+            <a:off x="825500" y="916145"/>
+            <a:ext cx="11018520" cy="1325563"/>
+          </a:xfrm>
+        </p:spPr>
+        <p:txBody>
+          <a:bodyPr>
+            <a:noAutofit/>
+          </a:bodyPr>
+          <a:lstStyle/>
+          <a:p>
+            <a:r>
+              <a:rPr lang="ru-RU" sz="6000" dirty="0" smtClean="0">
+                <a:solidFill>
+                  <a:schemeClr val="accent4">
+                    <a:lumMod val="20000"/>
+                    <a:lumOff val="80000"/>
+                  </a:schemeClr>
+                </a:solidFill>
+                <a:latin typeface="Arial Black" panose="020B0A04020102020204" pitchFamily="34" charset="0"/>
+              </a:rPr>
+              <a:t>Возможности </a:t>
+            </a:r>
+            <a:r>
+              <a:rPr lang="ru-RU" sz="6000" dirty="0">
+                <a:solidFill>
+                  <a:schemeClr val="accent4">
+                    <a:lumMod val="20000"/>
+                    <a:lumOff val="80000"/>
+                  </a:schemeClr>
+                </a:solidFill>
+                <a:latin typeface="Arial Black" panose="020B0A04020102020204" pitchFamily="34" charset="0"/>
+              </a:rPr>
+              <a:t>для доработки и развития</a:t>
+            </a:r>
+          </a:p>
+        </p:txBody>
+      </p:sp>
+      <p:sp>
+        <p:nvSpPr>
+          <p:cNvPr id="3" name="Объект 2"/>
+          <p:cNvSpPr>
+            <a:spLocks noGrp="1"/>
+          </p:cNvSpPr>
+          <p:nvPr>
+            <p:ph idx="1"/>
+          </p:nvPr>
+        </p:nvSpPr>
+        <p:spPr>
+          <a:xfrm>
+            <a:off x="825500" y="2864142"/>
+            <a:ext cx="11018520" cy="4351338"/>
+          </a:xfrm>
+        </p:spPr>
+        <p:txBody>
+          <a:bodyPr/>
+          <a:lstStyle/>
+          <a:p>
+            <a:r>
+              <a:rPr lang="ru-RU" sz="4400" dirty="0" smtClean="0">
+                <a:solidFill>
+                  <a:schemeClr val="bg1"/>
+                </a:solidFill>
+              </a:rPr>
+              <a:t>Сотрудничество с центрами психологической помощи, психологами</a:t>
+            </a:r>
+          </a:p>
+          <a:p>
+            <a:r>
+              <a:rPr lang="ru-RU" sz="4400" dirty="0" smtClean="0">
+                <a:solidFill>
+                  <a:schemeClr val="bg1"/>
+                </a:solidFill>
+              </a:rPr>
+              <a:t>Внедрение ИИ-помощника</a:t>
+            </a:r>
+          </a:p>
+          <a:p>
+            <a:endParaRPr lang="ru-RU" dirty="0" smtClean="0"/>
+          </a:p>
+          <a:p>
+            <a:endParaRPr lang="ru-RU" dirty="0"/>
+          </a:p>
+        </p:txBody>
+      </p:sp>
+    </p:spTree>
+    <p:extLst>
+      <p:ext uri="{BB962C8B-B14F-4D97-AF65-F5344CB8AC3E}">
+        <p14:creationId xmlns:p14="http://schemas.microsoft.com/office/powerpoint/2010/main" val="2312842823"/>
+      </p:ext>
+    </p:extLst>
+  </p:cSld>
+  <p:clrMapOvr>
+    <a:masterClrMapping/>
+  </p:clrMapOvr>
+  <p:timing>
+    <p:tnLst>
+      <p:par>
+        <p:cTn id="1" dur="indefinite" restart="never" nodeType="tmRoot"/>
+      </p:par>
+    </p:tnLst>
+  </p:timing>
+</p:sld>
+</file>
+
+<file path=ppt/slides/slide12.xml><?xml version="1.0" encoding="utf-8"?>
+<p:sld xmlns:a="http://schemas.openxmlformats.org/drawingml/2006/main" xmlns:r="http://schemas.openxmlformats.org/officeDocument/2006/relationships" xmlns:p="http://schemas.openxmlformats.org/presentationml/2006/main">
+  <p:cSld>
+    <p:spTree>
+      <p:nvGrpSpPr>
+        <p:cNvPr id="1" name=""/>
+        <p:cNvGrpSpPr/>
+        <p:nvPr/>
+      </p:nvGrpSpPr>
+      <p:grpSpPr>
+        <a:xfrm>
+          <a:off x="0" y="0"/>
+          <a:ext cx="0" cy="0"/>
+          <a:chOff x="0" y="0"/>
+          <a:chExt cx="0" cy="0"/>
+        </a:xfrm>
+      </p:grpSpPr>
+      <p:pic>
+        <p:nvPicPr>
+          <p:cNvPr id="4" name="Рисунок 3"/>
+          <p:cNvPicPr>
+            <a:picLocks noChangeAspect="1"/>
+          </p:cNvPicPr>
+          <p:nvPr/>
+        </p:nvPicPr>
+        <p:blipFill>
+          <a:blip r:embed="rId2"/>
+          <a:stretch>
+            <a:fillRect/>
+          </a:stretch>
+        </p:blipFill>
+        <p:spPr>
+          <a:xfrm>
+            <a:off x="-620826" y="-206687"/>
+            <a:ext cx="13076985" cy="11620039"/>
+          </a:xfrm>
+          <a:prstGeom prst="rect">
+            <a:avLst/>
+          </a:prstGeom>
+        </p:spPr>
+      </p:pic>
+      <p:sp>
+        <p:nvSpPr>
+          <p:cNvPr id="6" name="Прямоугольник 5"/>
+          <p:cNvSpPr/>
+          <p:nvPr/>
+        </p:nvSpPr>
+        <p:spPr>
+          <a:xfrm>
+            <a:off x="-111760" y="-206687"/>
+            <a:ext cx="13248640" cy="8090847"/>
+          </a:xfrm>
+          <a:prstGeom prst="rect">
+            <a:avLst/>
+          </a:prstGeom>
+          <a:solidFill>
+            <a:schemeClr val="accent1">
+              <a:lumMod val="60000"/>
+              <a:lumOff val="40000"/>
+              <a:alpha val="74000"/>
+            </a:schemeClr>
+          </a:solidFill>
+        </p:spPr>
+        <p:style>
+          <a:lnRef idx="2">
+            <a:schemeClr val="accent1">
+              <a:shade val="50000"/>
+            </a:schemeClr>
+          </a:lnRef>
+          <a:fillRef idx="1">
+            <a:schemeClr val="accent1"/>
+          </a:fillRef>
+          <a:effectRef idx="0">
+            <a:schemeClr val="accent1"/>
+          </a:effectRef>
+          <a:fontRef idx="minor">
+            <a:schemeClr val="lt1"/>
+          </a:fontRef>
+        </p:style>
+        <p:txBody>
+          <a:bodyPr rtlCol="0" anchor="ctr"/>
+          <a:lstStyle/>
+          <a:p>
+            <a:pPr algn="ctr"/>
+            <a:endParaRPr lang="ru-RU"/>
+          </a:p>
+        </p:txBody>
+      </p:sp>
+      <p:sp>
+        <p:nvSpPr>
+          <p:cNvPr id="2" name="Заголовок 1"/>
+          <p:cNvSpPr>
+            <a:spLocks noGrp="1"/>
+          </p:cNvSpPr>
+          <p:nvPr>
+            <p:ph type="title"/>
+          </p:nvPr>
+        </p:nvSpPr>
+        <p:spPr>
+          <a:xfrm>
+            <a:off x="-579653" y="1533525"/>
+            <a:ext cx="12994638" cy="3688715"/>
+          </a:xfrm>
+        </p:spPr>
+        <p:txBody>
+          <a:bodyPr>
+            <a:normAutofit/>
+          </a:bodyPr>
+          <a:lstStyle/>
+          <a:p>
+            <a:pPr algn="ctr"/>
+            <a:r>
+              <a:rPr lang="ru-RU" sz="6000" dirty="0" smtClean="0">
+                <a:solidFill>
+                  <a:schemeClr val="bg1"/>
+                </a:solidFill>
+                <a:latin typeface="Arial Black" panose="020B0A04020102020204" pitchFamily="34" charset="0"/>
+              </a:rPr>
+              <a:t>Спасибо за внимание!</a:t>
+            </a:r>
+            <a:endParaRPr lang="ru-RU" sz="6000" dirty="0">
+              <a:solidFill>
+                <a:schemeClr val="bg1"/>
+              </a:solidFill>
+              <a:latin typeface="Arial Black" panose="020B0A04020102020204" pitchFamily="34" charset="0"/>
+            </a:endParaRPr>
+          </a:p>
+        </p:txBody>
+      </p:sp>
+    </p:spTree>
+    <p:extLst>
+      <p:ext uri="{BB962C8B-B14F-4D97-AF65-F5344CB8AC3E}">
+        <p14:creationId xmlns:p14="http://schemas.microsoft.com/office/powerpoint/2010/main" val="2883145236"/>
+      </p:ext>
+    </p:extLst>
+  </p:cSld>
+  <p:clrMapOvr>
+    <a:masterClrMapping/>
+  </p:clrMapOvr>
+  <p:timing>
+    <p:tnLst>
+      <p:par>
+        <p:cTn id="1" dur="indefinite" restart="never" nodeType="tmRoot"/>
+      </p:par>
+    </p:tnLst>
+  </p:timing>
+</p:sld>
+</file>
+
 <file path=ppt/slides/slide2.xml><?xml version="1.0" encoding="utf-8"?>
 <p:sld xmlns:a="http://schemas.openxmlformats.org/drawingml/2006/main" xmlns:r="http://schemas.openxmlformats.org/officeDocument/2006/relationships" xmlns:p="http://schemas.openxmlformats.org/presentationml/2006/main">
   <p:cSld>
@@ -3309,7 +3770,7 @@
           </a:prstGeom>
           <a:solidFill>
             <a:schemeClr val="accent1">
-              <a:alpha val="60000"/>
+              <a:alpha val="69000"/>
             </a:schemeClr>
           </a:solidFill>
         </p:spPr>
@@ -3577,9 +4038,8 @@
           </a:prstGeom>
           <a:solidFill>
             <a:schemeClr val="accent1">
-              <a:lumMod val="60000"/>
-              <a:lumOff val="40000"/>
-              <a:alpha val="79000"/>
+              <a:lumMod val="75000"/>
+              <a:alpha val="71000"/>
             </a:schemeClr>
           </a:solidFill>
         </p:spPr>
@@ -3849,8 +4309,8 @@
         </p:blipFill>
         <p:spPr>
           <a:xfrm>
-            <a:off x="575568" y="660401"/>
-            <a:ext cx="10959226" cy="5516562"/>
+            <a:off x="197433" y="462458"/>
+            <a:ext cx="11797134" cy="5938341"/>
           </a:xfrm>
           <a:prstGeom prst="rect">
             <a:avLst/>
@@ -4236,6 +4696,17 @@
 <file path=ppt/slides/slide8.xml><?xml version="1.0" encoding="utf-8"?>
 <p:sld xmlns:a="http://schemas.openxmlformats.org/drawingml/2006/main" xmlns:r="http://schemas.openxmlformats.org/officeDocument/2006/relationships" xmlns:p="http://schemas.openxmlformats.org/presentationml/2006/main">
   <p:cSld>
+    <p:bg>
+      <p:bgPr>
+        <a:solidFill>
+          <a:schemeClr val="accent1">
+            <a:lumMod val="20000"/>
+            <a:lumOff val="80000"/>
+          </a:schemeClr>
+        </a:solidFill>
+        <a:effectLst/>
+      </p:bgPr>
+    </p:bg>
     <p:spTree>
       <p:nvGrpSpPr>
         <p:cNvPr id="1" name=""/>
@@ -4250,75 +4721,6 @@
           <a:chExt cx="0" cy="0"/>
         </a:xfrm>
       </p:grpSpPr>
-      <p:pic>
-        <p:nvPicPr>
-          <p:cNvPr id="5" name="Рисунок 4"/>
-          <p:cNvPicPr>
-            <a:picLocks noChangeAspect="1"/>
-          </p:cNvPicPr>
-          <p:nvPr/>
-        </p:nvPicPr>
-        <p:blipFill>
-          <a:blip r:embed="rId2"/>
-          <a:stretch>
-            <a:fillRect/>
-          </a:stretch>
-        </p:blipFill>
-        <p:spPr>
-          <a:xfrm>
-            <a:off x="-142240" y="-363441"/>
-            <a:ext cx="12415520" cy="8282636"/>
-          </a:xfrm>
-          <a:prstGeom prst="rect">
-            <a:avLst/>
-          </a:prstGeom>
-        </p:spPr>
-      </p:pic>
-      <p:sp>
-        <p:nvSpPr>
-          <p:cNvPr id="6" name="Прямоугольник 5"/>
-          <p:cNvSpPr/>
-          <p:nvPr/>
-        </p:nvSpPr>
-        <p:spPr>
-          <a:xfrm>
-            <a:off x="-142240" y="-363441"/>
-            <a:ext cx="12954000" cy="8623521"/>
-          </a:xfrm>
-          <a:prstGeom prst="rect">
-            <a:avLst/>
-          </a:prstGeom>
-          <a:solidFill>
-            <a:schemeClr val="accent1">
-              <a:alpha val="51000"/>
-            </a:schemeClr>
-          </a:solidFill>
-        </p:spPr>
-        <p:style>
-          <a:lnRef idx="2">
-            <a:schemeClr val="accent1">
-              <a:shade val="50000"/>
-            </a:schemeClr>
-          </a:lnRef>
-          <a:fillRef idx="1">
-            <a:schemeClr val="accent1"/>
-          </a:fillRef>
-          <a:effectRef idx="0">
-            <a:schemeClr val="accent1"/>
-          </a:effectRef>
-          <a:fontRef idx="minor">
-            <a:schemeClr val="lt1"/>
-          </a:fontRef>
-        </p:style>
-        <p:txBody>
-          <a:bodyPr rtlCol="0" anchor="ctr"/>
-          <a:lstStyle/>
-          <a:p>
-            <a:pPr algn="ctr"/>
-            <a:endParaRPr lang="ru-RU"/>
-          </a:p>
-        </p:txBody>
-      </p:sp>
       <p:sp>
         <p:nvSpPr>
           <p:cNvPr id="2" name="Заголовок 1"/>
@@ -4329,42 +4731,12 @@
             <p:ph type="title"/>
           </p:nvPr>
         </p:nvSpPr>
-        <p:spPr>
-          <a:xfrm>
-            <a:off x="825500" y="916145"/>
-            <a:ext cx="11018520" cy="1325563"/>
-          </a:xfrm>
-        </p:spPr>
-        <p:txBody>
-          <a:bodyPr>
-            <a:noAutofit/>
-          </a:bodyPr>
-          <a:lstStyle/>
-          <a:p>
-            <a:r>
-              <a:rPr lang="ru-RU" sz="6000" dirty="0" smtClean="0">
-                <a:solidFill>
-                  <a:schemeClr val="accent4">
-                    <a:lumMod val="20000"/>
-                    <a:lumOff val="80000"/>
-                  </a:schemeClr>
-                </a:solidFill>
-                <a:latin typeface="Arial Black" panose="020B0A04020102020204" pitchFamily="34" charset="0"/>
-              </a:rPr>
-              <a:t>Возможности </a:t>
-            </a:r>
-            <a:r>
-              <a:rPr lang="ru-RU" sz="6000" dirty="0">
-                <a:solidFill>
-                  <a:schemeClr val="accent4">
-                    <a:lumMod val="20000"/>
-                    <a:lumOff val="80000"/>
-                  </a:schemeClr>
-                </a:solidFill>
-                <a:latin typeface="Arial Black" panose="020B0A04020102020204" pitchFamily="34" charset="0"/>
-              </a:rPr>
-              <a:t>для доработки и развития</a:t>
-            </a:r>
+        <p:spPr/>
+        <p:txBody>
+          <a:bodyPr/>
+          <a:lstStyle/>
+          <a:p>
+            <a:endParaRPr lang="ru-RU"/>
           </a:p>
         </p:txBody>
       </p:sp>
@@ -4378,80 +4750,15 @@
             <p:ph idx="1"/>
           </p:nvPr>
         </p:nvSpPr>
-        <p:spPr>
-          <a:xfrm>
-            <a:off x="825500" y="2864142"/>
-            <a:ext cx="11018520" cy="4351338"/>
-          </a:xfrm>
-        </p:spPr>
-        <p:txBody>
-          <a:bodyPr/>
-          <a:lstStyle/>
-          <a:p>
-            <a:r>
-              <a:rPr lang="ru-RU" sz="4400" dirty="0" smtClean="0">
-                <a:solidFill>
-                  <a:schemeClr val="bg1"/>
-                </a:solidFill>
-              </a:rPr>
-              <a:t>Сотрудничество с центрами психологической помощи, психологами</a:t>
-            </a:r>
-          </a:p>
-          <a:p>
-            <a:r>
-              <a:rPr lang="ru-RU" sz="4400" dirty="0" smtClean="0">
-                <a:solidFill>
-                  <a:schemeClr val="bg1"/>
-                </a:solidFill>
-              </a:rPr>
-              <a:t>Внедрение ИИ-помощника</a:t>
-            </a:r>
-          </a:p>
-          <a:p>
-            <a:endParaRPr lang="ru-RU" dirty="0" smtClean="0"/>
-          </a:p>
-          <a:p>
-            <a:endParaRPr lang="ru-RU" dirty="0"/>
-          </a:p>
-        </p:txBody>
-      </p:sp>
-    </p:spTree>
-    <p:extLst>
-      <p:ext uri="{BB962C8B-B14F-4D97-AF65-F5344CB8AC3E}">
-        <p14:creationId xmlns:p14="http://schemas.microsoft.com/office/powerpoint/2010/main" val="2312842823"/>
-      </p:ext>
-    </p:extLst>
-  </p:cSld>
-  <p:clrMapOvr>
-    <a:masterClrMapping/>
-  </p:clrMapOvr>
-  <p:timing>
-    <p:tnLst>
-      <p:par>
-        <p:cTn id="1" dur="indefinite" restart="never" nodeType="tmRoot"/>
-      </p:par>
-    </p:tnLst>
-  </p:timing>
-</p:sld>
-</file>
-
-<file path=ppt/slides/slide9.xml><?xml version="1.0" encoding="utf-8"?>
-<p:sld xmlns:a="http://schemas.openxmlformats.org/drawingml/2006/main" xmlns:r="http://schemas.openxmlformats.org/officeDocument/2006/relationships" xmlns:p="http://schemas.openxmlformats.org/presentationml/2006/main">
-  <p:cSld>
-    <p:spTree>
-      <p:nvGrpSpPr>
-        <p:cNvPr id="1" name=""/>
-        <p:cNvGrpSpPr/>
-        <p:nvPr/>
-      </p:nvGrpSpPr>
-      <p:grpSpPr>
-        <a:xfrm>
-          <a:off x="0" y="0"/>
-          <a:ext cx="0" cy="0"/>
-          <a:chOff x="0" y="0"/>
-          <a:chExt cx="0" cy="0"/>
-        </a:xfrm>
-      </p:grpSpPr>
+        <p:spPr/>
+        <p:txBody>
+          <a:bodyPr/>
+          <a:lstStyle/>
+          <a:p>
+            <a:endParaRPr lang="ru-RU"/>
+          </a:p>
+        </p:txBody>
+      </p:sp>
       <p:pic>
         <p:nvPicPr>
           <p:cNvPr id="4" name="Рисунок 3"/>
@@ -4468,119 +4775,127 @@
         </p:blipFill>
         <p:spPr>
           <a:xfrm>
-            <a:off x="-620826" y="-206687"/>
-            <a:ext cx="13076985" cy="11620039"/>
+            <a:off x="1165619" y="0"/>
+            <a:ext cx="9837662" cy="6861637"/>
           </a:xfrm>
           <a:prstGeom prst="rect">
             <a:avLst/>
           </a:prstGeom>
         </p:spPr>
       </p:pic>
-      <p:sp>
-        <p:nvSpPr>
-          <p:cNvPr id="6" name="Прямоугольник 5"/>
-          <p:cNvSpPr/>
-          <p:nvPr/>
-        </p:nvSpPr>
-        <p:spPr>
-          <a:xfrm>
-            <a:off x="-111760" y="-206687"/>
-            <a:ext cx="13248640" cy="8090847"/>
-          </a:xfrm>
-          <a:prstGeom prst="rect">
-            <a:avLst/>
-          </a:prstGeom>
-          <a:solidFill>
-            <a:schemeClr val="accent1">
-              <a:lumMod val="60000"/>
-              <a:lumOff val="40000"/>
-              <a:alpha val="73000"/>
-            </a:schemeClr>
-          </a:solidFill>
-        </p:spPr>
-        <p:style>
-          <a:lnRef idx="2">
-            <a:schemeClr val="accent1">
-              <a:shade val="50000"/>
-            </a:schemeClr>
-          </a:lnRef>
-          <a:fillRef idx="1">
-            <a:schemeClr val="accent1"/>
-          </a:fillRef>
-          <a:effectRef idx="0">
-            <a:schemeClr val="accent1"/>
-          </a:effectRef>
-          <a:fontRef idx="minor">
-            <a:schemeClr val="lt1"/>
-          </a:fontRef>
-        </p:style>
-        <p:txBody>
-          <a:bodyPr rtlCol="0" anchor="ctr"/>
-          <a:lstStyle/>
-          <a:p>
-            <a:pPr algn="ctr"/>
-            <a:endParaRPr lang="ru-RU"/>
-          </a:p>
-        </p:txBody>
-      </p:sp>
-      <p:sp>
-        <p:nvSpPr>
-          <p:cNvPr id="2" name="Заголовок 1"/>
-          <p:cNvSpPr>
-            <a:spLocks noGrp="1"/>
-          </p:cNvSpPr>
-          <p:nvPr>
-            <p:ph type="title"/>
-          </p:nvPr>
-        </p:nvSpPr>
-        <p:spPr>
-          <a:xfrm>
-            <a:off x="-579653" y="1533525"/>
-            <a:ext cx="12994638" cy="3688715"/>
-          </a:xfrm>
-        </p:spPr>
-        <p:txBody>
-          <a:bodyPr>
-            <a:normAutofit/>
-          </a:bodyPr>
-          <a:lstStyle/>
-          <a:p>
-            <a:pPr algn="ctr"/>
-            <a:r>
-              <a:rPr lang="ru-RU" sz="6000" dirty="0" smtClean="0">
-                <a:solidFill>
-                  <a:schemeClr val="bg1"/>
-                </a:solidFill>
-                <a:latin typeface="Arial Black" panose="020B0A04020102020204" pitchFamily="34" charset="0"/>
-              </a:rPr>
-              <a:t>Спасибо за внимание!</a:t>
-            </a:r>
-            <a:endParaRPr lang="ru-RU" sz="6000" dirty="0">
-              <a:solidFill>
-                <a:schemeClr val="bg1"/>
-              </a:solidFill>
-              <a:latin typeface="Arial Black" panose="020B0A04020102020204" pitchFamily="34" charset="0"/>
-            </a:endParaRPr>
-          </a:p>
-        </p:txBody>
-      </p:sp>
     </p:spTree>
     <p:extLst>
       <p:ext uri="{BB962C8B-B14F-4D97-AF65-F5344CB8AC3E}">
-        <p14:creationId xmlns:p14="http://schemas.microsoft.com/office/powerpoint/2010/main" val="2883145236"/>
+        <p14:creationId xmlns:p14="http://schemas.microsoft.com/office/powerpoint/2010/main" val="4047895482"/>
       </p:ext>
     </p:extLst>
   </p:cSld>
   <p:clrMapOvr>
     <a:masterClrMapping/>
   </p:clrMapOvr>
-  <p:timing>
-    <p:tnLst>
-      <p:par>
-        <p:cTn id="1" dur="indefinite" restart="never" nodeType="tmRoot"/>
-      </p:par>
-    </p:tnLst>
-  </p:timing>
+</p:sld>
+</file>
+
+<file path=ppt/slides/slide9.xml><?xml version="1.0" encoding="utf-8"?>
+<p:sld xmlns:a="http://schemas.openxmlformats.org/drawingml/2006/main" xmlns:r="http://schemas.openxmlformats.org/officeDocument/2006/relationships" xmlns:p="http://schemas.openxmlformats.org/presentationml/2006/main">
+  <p:cSld>
+    <p:bg>
+      <p:bgPr>
+        <a:solidFill>
+          <a:schemeClr val="accent1">
+            <a:lumMod val="60000"/>
+            <a:lumOff val="40000"/>
+          </a:schemeClr>
+        </a:solidFill>
+        <a:effectLst/>
+      </p:bgPr>
+    </p:bg>
+    <p:spTree>
+      <p:nvGrpSpPr>
+        <p:cNvPr id="1" name=""/>
+        <p:cNvGrpSpPr/>
+        <p:nvPr/>
+      </p:nvGrpSpPr>
+      <p:grpSpPr>
+        <a:xfrm>
+          <a:off x="0" y="0"/>
+          <a:ext cx="0" cy="0"/>
+          <a:chOff x="0" y="0"/>
+          <a:chExt cx="0" cy="0"/>
+        </a:xfrm>
+      </p:grpSpPr>
+      <p:sp>
+        <p:nvSpPr>
+          <p:cNvPr id="2" name="Заголовок 1"/>
+          <p:cNvSpPr>
+            <a:spLocks noGrp="1"/>
+          </p:cNvSpPr>
+          <p:nvPr>
+            <p:ph type="title"/>
+          </p:nvPr>
+        </p:nvSpPr>
+        <p:spPr/>
+        <p:txBody>
+          <a:bodyPr/>
+          <a:lstStyle/>
+          <a:p>
+            <a:endParaRPr lang="ru-RU"/>
+          </a:p>
+        </p:txBody>
+      </p:sp>
+      <p:sp>
+        <p:nvSpPr>
+          <p:cNvPr id="3" name="Объект 2"/>
+          <p:cNvSpPr>
+            <a:spLocks noGrp="1"/>
+          </p:cNvSpPr>
+          <p:nvPr>
+            <p:ph idx="1"/>
+          </p:nvPr>
+        </p:nvSpPr>
+        <p:spPr/>
+        <p:txBody>
+          <a:bodyPr/>
+          <a:lstStyle/>
+          <a:p>
+            <a:endParaRPr lang="ru-RU"/>
+          </a:p>
+        </p:txBody>
+      </p:sp>
+      <p:pic>
+        <p:nvPicPr>
+          <p:cNvPr id="4" name="Рисунок 3"/>
+          <p:cNvPicPr>
+            <a:picLocks noChangeAspect="1"/>
+          </p:cNvPicPr>
+          <p:nvPr/>
+        </p:nvPicPr>
+        <p:blipFill>
+          <a:blip r:embed="rId2"/>
+          <a:stretch>
+            <a:fillRect/>
+          </a:stretch>
+        </p:blipFill>
+        <p:spPr>
+          <a:xfrm>
+            <a:off x="0" y="598788"/>
+            <a:ext cx="12212320" cy="5689935"/>
+          </a:xfrm>
+          <a:prstGeom prst="rect">
+            <a:avLst/>
+          </a:prstGeom>
+        </p:spPr>
+      </p:pic>
+    </p:spTree>
+    <p:extLst>
+      <p:ext uri="{BB962C8B-B14F-4D97-AF65-F5344CB8AC3E}">
+        <p14:creationId xmlns:p14="http://schemas.microsoft.com/office/powerpoint/2010/main" val="2302786488"/>
+      </p:ext>
+    </p:extLst>
+  </p:cSld>
+  <p:clrMapOvr>
+    <a:masterClrMapping/>
+  </p:clrMapOvr>
 </p:sld>
 </file>
 
